--- a/classes/parte-18-ia-aplicada-a-la-ciberseguridad/334-reconocimiento-y-escaneo-asistidos-por-ia/clase-334-presentacion.pptx
+++ b/classes/parte-18-ia-aplicada-a-la-ciberseguridad/334-reconocimiento-y-escaneo-asistidos-por-ia/clase-334-presentacion.pptx
@@ -17,6 +17,10 @@
     <p:sldId id="265" r:id="rId16"/>
     <p:sldId id="266" r:id="rId17"/>
     <p:sldId id="267" r:id="rId18"/>
+    <p:sldId id="268" r:id="rId19"/>
+    <p:sldId id="269" r:id="rId20"/>
+    <p:sldId id="270" r:id="rId21"/>
+    <p:sldId id="271" r:id="rId22"/>
   </p:sldIdLst>
   <p:sldSz cx="9144000" cy="6858000" type="screen4x3"/>
   <p:notesSz cx="6858000" cy="9144000"/>
@@ -3198,7 +3202,7 @@
                   <a:srgbClr val="0B3D2E"/>
                 </a:solidFill>
               </a:rPr>
-              <a:t>⚠️ Errores comunes</a:t>
+              <a:t>🧪 Laboratorio guiado</a:t>
             </a:r>
           </a:p>
         </p:txBody>
@@ -3236,52 +3240,67 @@
                   <a:srgbClr val="22282E"/>
                 </a:solidFill>
               </a:rPr>
-              <a:t>•  El resumen del agente omite un puerto abierto — La IA puede resumir de más. Revisa la salida cruda completa.</a:t>
-            </a:r>
-          </a:p>
-          <a:p>
-            <a:pPr>
-              <a:spcAft>
-                <a:spcPts val="600"/>
-              </a:spcAft>
-            </a:pPr>
-            <a:r>
-              <a:rPr sz="1500">
-                <a:solidFill>
-                  <a:srgbClr val="22282E"/>
-                </a:solidFill>
-              </a:rPr>
-              <a:t>•  El agente "descubre" servicios inexistentes — Alucinación o mala lectura. Valida a mano.</a:t>
-            </a:r>
-          </a:p>
-          <a:p>
-            <a:pPr>
-              <a:spcAft>
-                <a:spcPts val="600"/>
-              </a:spcAft>
-            </a:pPr>
-            <a:r>
-              <a:rPr sz="1500">
-                <a:solidFill>
-                  <a:srgbClr val="22282E"/>
-                </a:solidFill>
-              </a:rPr>
-              <a:t>•  Escaneo alcanza IPs fuera de alcance — Redefine el scope; nunca amplíes sin autorización.</a:t>
-            </a:r>
-          </a:p>
-          <a:p>
-            <a:pPr>
-              <a:spcAft>
-                <a:spcPts val="600"/>
-              </a:spcAft>
-            </a:pPr>
-            <a:r>
-              <a:rPr sz="1500">
-                <a:solidFill>
-                  <a:srgbClr val="22282E"/>
-                </a:solidFill>
-              </a:rPr>
-              <a:t>•  Escaneo demasiado agresivo — Ajusta timing/rate; en un lab compartido puedes tirar servicios.</a:t>
+              <a:t>•  Recon pasivo. Pide al agente un resumen de la información pública del objetivo (en el lab, será mínima). Observa qué infiere y qué inventa.</a:t>
+            </a:r>
+          </a:p>
+          <a:p>
+            <a:pPr>
+              <a:spcAft>
+                <a:spcPts val="600"/>
+              </a:spcAft>
+            </a:pPr>
+            <a:r>
+              <a:rPr sz="1500">
+                <a:solidFill>
+                  <a:srgbClr val="22282E"/>
+                </a:solidFill>
+              </a:rPr>
+              <a:t>•  Descubrimiento de hosts/puertos. Ejecuta el flujo de escaneo y revisa la lista de puertos/servicios propuesta.</a:t>
+            </a:r>
+          </a:p>
+          <a:p>
+            <a:pPr>
+              <a:spcAft>
+                <a:spcPts val="600"/>
+              </a:spcAft>
+            </a:pPr>
+            <a:r>
+              <a:rPr sz="1500">
+                <a:solidFill>
+                  <a:srgbClr val="22282E"/>
+                </a:solidFill>
+              </a:rPr>
+              <a:t>•  Validación. Elige 3 hallazgos y confírmalos manualmente en la terminal (nmap -sV -p &lt;puertos&gt;). ¿Coinciden?</a:t>
+            </a:r>
+          </a:p>
+          <a:p>
+            <a:pPr>
+              <a:spcAft>
+                <a:spcPts val="600"/>
+              </a:spcAft>
+            </a:pPr>
+            <a:r>
+              <a:rPr sz="1500">
+                <a:solidFill>
+                  <a:srgbClr val="22282E"/>
+                </a:solidFill>
+              </a:rPr>
+              <a:t>•  Enumeración de servicios. Pide enumeración de un servicio concreto y contrasta con la salida cruda.</a:t>
+            </a:r>
+          </a:p>
+          <a:p>
+            <a:pPr>
+              <a:spcAft>
+                <a:spcPts val="600"/>
+              </a:spcAft>
+            </a:pPr>
+            <a:r>
+              <a:rPr sz="1500">
+                <a:solidFill>
+                  <a:srgbClr val="22282E"/>
+                </a:solidFill>
+              </a:rPr>
+              <a:t>•  Mapa de superficie. Documenta la superficie de ataque descubierta (host, puerto, servicio, versión, evidencia).</a:t>
             </a:r>
           </a:p>
         </p:txBody>
@@ -3332,7 +3351,7 @@
                   <a:srgbClr val="0B3D2E"/>
                 </a:solidFill>
               </a:rPr>
-              <a:t>❓ Preguntas frecuentes</a:t>
+              <a:t>✍️ Ejercicios</a:t>
             </a:r>
           </a:p>
         </p:txBody>
@@ -3370,82 +3389,67 @@
                   <a:srgbClr val="22282E"/>
                 </a:solidFill>
               </a:rPr>
-              <a:t>•  ❓ ¿La IA hace el recon más rápido?</a:t>
-            </a:r>
-          </a:p>
-          <a:p>
-            <a:pPr>
-              <a:spcAft>
-                <a:spcPts val="600"/>
-              </a:spcAft>
-            </a:pPr>
-            <a:r>
-              <a:rPr sz="1500">
-                <a:solidFill>
-                  <a:srgbClr val="22282E"/>
-                </a:solidFill>
-              </a:rPr>
-              <a:t>•  Sí, sobre todo correlacionando salidas y sugiriendo siguientes pasos. Pero la validación sigue</a:t>
-            </a:r>
-          </a:p>
-          <a:p>
-            <a:pPr>
-              <a:spcAft>
-                <a:spcPts val="600"/>
-              </a:spcAft>
-            </a:pPr>
-            <a:r>
-              <a:rPr sz="1500">
-                <a:solidFill>
-                  <a:srgbClr val="22282E"/>
-                </a:solidFill>
-              </a:rPr>
-              <a:t>•  siendo tuya: un recon con datos falsos arruina todo el pentest.</a:t>
-            </a:r>
-          </a:p>
-          <a:p>
-            <a:pPr>
-              <a:spcAft>
-                <a:spcPts val="600"/>
-              </a:spcAft>
-            </a:pPr>
-            <a:r>
-              <a:rPr sz="1500">
-                <a:solidFill>
-                  <a:srgbClr val="22282E"/>
-                </a:solidFill>
-              </a:rPr>
-              <a:t>•  ❓ ¿Puedo dejar que escanee solo?</a:t>
-            </a:r>
-          </a:p>
-          <a:p>
-            <a:pPr>
-              <a:spcAft>
-                <a:spcPts val="600"/>
-              </a:spcAft>
-            </a:pPr>
-            <a:r>
-              <a:rPr sz="1500">
-                <a:solidFill>
-                  <a:srgbClr val="22282E"/>
-                </a:solidFill>
-              </a:rPr>
-              <a:t>•  El escaneo activo debería requerir tu aprobación y un alcance claro. No lo dejes correr sin</a:t>
-            </a:r>
-          </a:p>
-          <a:p>
-            <a:pPr>
-              <a:spcAft>
-                <a:spcPts val="600"/>
-              </a:spcAft>
-            </a:pPr>
-            <a:r>
-              <a:rPr sz="1500">
-                <a:solidFill>
-                  <a:srgbClr val="22282E"/>
-                </a:solidFill>
-              </a:rPr>
-              <a:t>•  supervisión contra nada que no sea tu laboratorio.</a:t>
+              <a:t>•  Diferencia recon pasivo y activo con un ejemplo de cada uno.</a:t>
+            </a:r>
+          </a:p>
+          <a:p>
+            <a:pPr>
+              <a:spcAft>
+                <a:spcPts val="600"/>
+              </a:spcAft>
+            </a:pPr>
+            <a:r>
+              <a:rPr sz="1500">
+                <a:solidFill>
+                  <a:srgbClr val="22282E"/>
+                </a:solidFill>
+              </a:rPr>
+              <a:t>•  ¿Qué riesgo hay si el agente "asume" una versión de servicio que no verificó?</a:t>
+            </a:r>
+          </a:p>
+          <a:p>
+            <a:pPr>
+              <a:spcAft>
+                <a:spcPts val="600"/>
+              </a:spcAft>
+            </a:pPr>
+            <a:r>
+              <a:rPr sz="1500">
+                <a:solidFill>
+                  <a:srgbClr val="22282E"/>
+                </a:solidFill>
+              </a:rPr>
+              <a:t>•  Diseña un límite de ritmo (rate) para no saturar una red de laboratorio.</a:t>
+            </a:r>
+          </a:p>
+          <a:p>
+            <a:pPr>
+              <a:spcAft>
+                <a:spcPts val="600"/>
+              </a:spcAft>
+            </a:pPr>
+            <a:r>
+              <a:rPr sz="1500">
+                <a:solidFill>
+                  <a:srgbClr val="22282E"/>
+                </a:solidFill>
+              </a:rPr>
+              <a:t>•  ¿Cómo confirmarías un subdominio que el agente afirma haber encontrado?</a:t>
+            </a:r>
+          </a:p>
+          <a:p>
+            <a:pPr>
+              <a:spcAft>
+                <a:spcPts val="600"/>
+              </a:spcAft>
+            </a:pPr>
+            <a:r>
+              <a:rPr sz="1500">
+                <a:solidFill>
+                  <a:srgbClr val="22282E"/>
+                </a:solidFill>
+              </a:rPr>
+              <a:t>•  Redacta la sección "superficie de ataque" de un informe a partir del recon.</a:t>
             </a:r>
           </a:p>
         </p:txBody>
@@ -3496,7 +3500,7 @@
                   <a:srgbClr val="0B3D2E"/>
                 </a:solidFill>
               </a:rPr>
-              <a:t>🔗 Referencias</a:t>
+              <a:t>📝 Reto verificable</a:t>
             </a:r>
           </a:p>
         </p:txBody>
@@ -3534,6 +3538,438 @@
                   <a:srgbClr val="22282E"/>
                 </a:solidFill>
               </a:rPr>
+              <a:t>•  Con el agente, mapea la superficie de ataque de tu VM y entrega una tabla host/puerto/servicio;</a:t>
+            </a:r>
+          </a:p>
+          <a:p>
+            <a:pPr>
+              <a:spcAft>
+                <a:spcPts val="600"/>
+              </a:spcAft>
+            </a:pPr>
+            <a:r>
+              <a:rPr sz="1500">
+                <a:solidFill>
+                  <a:srgbClr val="22282E"/>
+                </a:solidFill>
+              </a:rPr>
+              <a:t>•  valida manualmente al menos el 50% de las entradas.</a:t>
+            </a:r>
+          </a:p>
+          <a:p>
+            <a:pPr>
+              <a:spcAft>
+                <a:spcPts val="600"/>
+              </a:spcAft>
+            </a:pPr>
+            <a:r>
+              <a:rPr sz="1500">
+                <a:solidFill>
+                  <a:srgbClr val="22282E"/>
+                </a:solidFill>
+              </a:rPr>
+              <a:t>•  Criterio de aceptación: cada entrada validada coincide con la salida real de la herramienta;</a:t>
+            </a:r>
+          </a:p>
+          <a:p>
+            <a:pPr>
+              <a:spcAft>
+                <a:spcPts val="600"/>
+              </a:spcAft>
+            </a:pPr>
+            <a:r>
+              <a:rPr sz="1500">
+                <a:solidFill>
+                  <a:srgbClr val="22282E"/>
+                </a:solidFill>
+              </a:rPr>
+              <a:t>•  señalas cualquier hallazgo del agente que no pudiste confirmar (posible falso positivo).</a:t>
+            </a:r>
+          </a:p>
+        </p:txBody>
+      </p:sp>
+    </p:spTree>
+  </p:cSld>
+  <p:clrMapOvr>
+    <a:masterClrMapping/>
+  </p:clrMapOvr>
+</p:sld>
+</file>
+
+<file path=ppt/slides/slide13.xml><?xml version="1.0" encoding="utf-8"?>
+<p:sld xmlns:a="http://schemas.openxmlformats.org/drawingml/2006/main" xmlns:p="http://schemas.openxmlformats.org/presentationml/2006/main" xmlns:r="http://schemas.openxmlformats.org/officeDocument/2006/relationships">
+  <p:cSld>
+    <p:spTree>
+      <p:nvGrpSpPr>
+        <p:cNvPr id="1" name=""/>
+        <p:cNvGrpSpPr/>
+        <p:nvPr/>
+      </p:nvGrpSpPr>
+      <p:grpSpPr/>
+      <p:sp>
+        <p:nvSpPr>
+          <p:cNvPr id="2" name="TextBox 1"/>
+          <p:cNvSpPr txBox="1"/>
+          <p:nvPr/>
+        </p:nvSpPr>
+        <p:spPr>
+          <a:xfrm>
+            <a:off x="457200" y="320040"/>
+            <a:ext cx="8229600" cy="822960"/>
+          </a:xfrm>
+          <a:prstGeom prst="rect">
+            <a:avLst/>
+          </a:prstGeom>
+          <a:noFill/>
+        </p:spPr>
+        <p:txBody>
+          <a:bodyPr wrap="square">
+            <a:spAutoFit/>
+          </a:bodyPr>
+          <a:lstStyle/>
+          <a:p>
+            <a:r>
+              <a:rPr sz="2600" b="1">
+                <a:solidFill>
+                  <a:srgbClr val="0B3D2E"/>
+                </a:solidFill>
+              </a:rPr>
+              <a:t>⚠️ Errores comunes</a:t>
+            </a:r>
+          </a:p>
+        </p:txBody>
+      </p:sp>
+      <p:sp>
+        <p:nvSpPr>
+          <p:cNvPr id="3" name="TextBox 2"/>
+          <p:cNvSpPr txBox="1"/>
+          <p:nvPr/>
+        </p:nvSpPr>
+        <p:spPr>
+          <a:xfrm>
+            <a:off x="457200" y="1280160"/>
+            <a:ext cx="8229600" cy="4937760"/>
+          </a:xfrm>
+          <a:prstGeom prst="rect">
+            <a:avLst/>
+          </a:prstGeom>
+          <a:noFill/>
+        </p:spPr>
+        <p:txBody>
+          <a:bodyPr wrap="square">
+            <a:spAutoFit/>
+          </a:bodyPr>
+          <a:lstStyle/>
+          <a:p>
+            <a:pPr>
+              <a:spcAft>
+                <a:spcPts val="600"/>
+              </a:spcAft>
+            </a:pPr>
+            <a:r>
+              <a:rPr sz="1500">
+                <a:solidFill>
+                  <a:srgbClr val="22282E"/>
+                </a:solidFill>
+              </a:rPr>
+              <a:t>•  El resumen del agente omite un puerto abierto — La IA puede resumir de más. Revisa la salida cruda completa.</a:t>
+            </a:r>
+          </a:p>
+          <a:p>
+            <a:pPr>
+              <a:spcAft>
+                <a:spcPts val="600"/>
+              </a:spcAft>
+            </a:pPr>
+            <a:r>
+              <a:rPr sz="1500">
+                <a:solidFill>
+                  <a:srgbClr val="22282E"/>
+                </a:solidFill>
+              </a:rPr>
+              <a:t>•  El agente "descubre" servicios inexistentes — Alucinación o mala lectura. Valida a mano.</a:t>
+            </a:r>
+          </a:p>
+          <a:p>
+            <a:pPr>
+              <a:spcAft>
+                <a:spcPts val="600"/>
+              </a:spcAft>
+            </a:pPr>
+            <a:r>
+              <a:rPr sz="1500">
+                <a:solidFill>
+                  <a:srgbClr val="22282E"/>
+                </a:solidFill>
+              </a:rPr>
+              <a:t>•  Escaneo alcanza IPs fuera de alcance — Redefine el scope; nunca amplíes sin autorización.</a:t>
+            </a:r>
+          </a:p>
+          <a:p>
+            <a:pPr>
+              <a:spcAft>
+                <a:spcPts val="600"/>
+              </a:spcAft>
+            </a:pPr>
+            <a:r>
+              <a:rPr sz="1500">
+                <a:solidFill>
+                  <a:srgbClr val="22282E"/>
+                </a:solidFill>
+              </a:rPr>
+              <a:t>•  Escaneo demasiado agresivo — Ajusta timing/rate; en un lab compartido puedes tirar servicios.</a:t>
+            </a:r>
+          </a:p>
+        </p:txBody>
+      </p:sp>
+    </p:spTree>
+  </p:cSld>
+  <p:clrMapOvr>
+    <a:masterClrMapping/>
+  </p:clrMapOvr>
+</p:sld>
+</file>
+
+<file path=ppt/slides/slide14.xml><?xml version="1.0" encoding="utf-8"?>
+<p:sld xmlns:a="http://schemas.openxmlformats.org/drawingml/2006/main" xmlns:p="http://schemas.openxmlformats.org/presentationml/2006/main" xmlns:r="http://schemas.openxmlformats.org/officeDocument/2006/relationships">
+  <p:cSld>
+    <p:spTree>
+      <p:nvGrpSpPr>
+        <p:cNvPr id="1" name=""/>
+        <p:cNvGrpSpPr/>
+        <p:nvPr/>
+      </p:nvGrpSpPr>
+      <p:grpSpPr/>
+      <p:sp>
+        <p:nvSpPr>
+          <p:cNvPr id="2" name="TextBox 1"/>
+          <p:cNvSpPr txBox="1"/>
+          <p:nvPr/>
+        </p:nvSpPr>
+        <p:spPr>
+          <a:xfrm>
+            <a:off x="457200" y="320040"/>
+            <a:ext cx="8229600" cy="822960"/>
+          </a:xfrm>
+          <a:prstGeom prst="rect">
+            <a:avLst/>
+          </a:prstGeom>
+          <a:noFill/>
+        </p:spPr>
+        <p:txBody>
+          <a:bodyPr wrap="square">
+            <a:spAutoFit/>
+          </a:bodyPr>
+          <a:lstStyle/>
+          <a:p>
+            <a:r>
+              <a:rPr sz="2600" b="1">
+                <a:solidFill>
+                  <a:srgbClr val="0B3D2E"/>
+                </a:solidFill>
+              </a:rPr>
+              <a:t>❓ Preguntas frecuentes</a:t>
+            </a:r>
+          </a:p>
+        </p:txBody>
+      </p:sp>
+      <p:sp>
+        <p:nvSpPr>
+          <p:cNvPr id="3" name="TextBox 2"/>
+          <p:cNvSpPr txBox="1"/>
+          <p:nvPr/>
+        </p:nvSpPr>
+        <p:spPr>
+          <a:xfrm>
+            <a:off x="457200" y="1280160"/>
+            <a:ext cx="8229600" cy="4937760"/>
+          </a:xfrm>
+          <a:prstGeom prst="rect">
+            <a:avLst/>
+          </a:prstGeom>
+          <a:noFill/>
+        </p:spPr>
+        <p:txBody>
+          <a:bodyPr wrap="square">
+            <a:spAutoFit/>
+          </a:bodyPr>
+          <a:lstStyle/>
+          <a:p>
+            <a:pPr>
+              <a:spcAft>
+                <a:spcPts val="600"/>
+              </a:spcAft>
+            </a:pPr>
+            <a:r>
+              <a:rPr sz="1500">
+                <a:solidFill>
+                  <a:srgbClr val="22282E"/>
+                </a:solidFill>
+              </a:rPr>
+              <a:t>•  ❓ ¿La IA hace el recon más rápido?</a:t>
+            </a:r>
+          </a:p>
+          <a:p>
+            <a:pPr>
+              <a:spcAft>
+                <a:spcPts val="600"/>
+              </a:spcAft>
+            </a:pPr>
+            <a:r>
+              <a:rPr sz="1500">
+                <a:solidFill>
+                  <a:srgbClr val="22282E"/>
+                </a:solidFill>
+              </a:rPr>
+              <a:t>•  Sí, sobre todo correlacionando salidas y sugiriendo siguientes pasos. Pero la validación sigue</a:t>
+            </a:r>
+          </a:p>
+          <a:p>
+            <a:pPr>
+              <a:spcAft>
+                <a:spcPts val="600"/>
+              </a:spcAft>
+            </a:pPr>
+            <a:r>
+              <a:rPr sz="1500">
+                <a:solidFill>
+                  <a:srgbClr val="22282E"/>
+                </a:solidFill>
+              </a:rPr>
+              <a:t>•  siendo tuya: un recon con datos falsos arruina todo el pentest.</a:t>
+            </a:r>
+          </a:p>
+          <a:p>
+            <a:pPr>
+              <a:spcAft>
+                <a:spcPts val="600"/>
+              </a:spcAft>
+            </a:pPr>
+            <a:r>
+              <a:rPr sz="1500">
+                <a:solidFill>
+                  <a:srgbClr val="22282E"/>
+                </a:solidFill>
+              </a:rPr>
+              <a:t>•  ❓ ¿Puedo dejar que escanee solo?</a:t>
+            </a:r>
+          </a:p>
+          <a:p>
+            <a:pPr>
+              <a:spcAft>
+                <a:spcPts val="600"/>
+              </a:spcAft>
+            </a:pPr>
+            <a:r>
+              <a:rPr sz="1500">
+                <a:solidFill>
+                  <a:srgbClr val="22282E"/>
+                </a:solidFill>
+              </a:rPr>
+              <a:t>•  El escaneo activo debería requerir tu aprobación y un alcance claro. No lo dejes correr sin</a:t>
+            </a:r>
+          </a:p>
+          <a:p>
+            <a:pPr>
+              <a:spcAft>
+                <a:spcPts val="600"/>
+              </a:spcAft>
+            </a:pPr>
+            <a:r>
+              <a:rPr sz="1500">
+                <a:solidFill>
+                  <a:srgbClr val="22282E"/>
+                </a:solidFill>
+              </a:rPr>
+              <a:t>•  supervisión contra nada que no sea tu laboratorio.</a:t>
+            </a:r>
+          </a:p>
+        </p:txBody>
+      </p:sp>
+    </p:spTree>
+  </p:cSld>
+  <p:clrMapOvr>
+    <a:masterClrMapping/>
+  </p:clrMapOvr>
+</p:sld>
+</file>
+
+<file path=ppt/slides/slide15.xml><?xml version="1.0" encoding="utf-8"?>
+<p:sld xmlns:a="http://schemas.openxmlformats.org/drawingml/2006/main" xmlns:p="http://schemas.openxmlformats.org/presentationml/2006/main" xmlns:r="http://schemas.openxmlformats.org/officeDocument/2006/relationships">
+  <p:cSld>
+    <p:spTree>
+      <p:nvGrpSpPr>
+        <p:cNvPr id="1" name=""/>
+        <p:cNvGrpSpPr/>
+        <p:nvPr/>
+      </p:nvGrpSpPr>
+      <p:grpSpPr/>
+      <p:sp>
+        <p:nvSpPr>
+          <p:cNvPr id="2" name="TextBox 1"/>
+          <p:cNvSpPr txBox="1"/>
+          <p:nvPr/>
+        </p:nvSpPr>
+        <p:spPr>
+          <a:xfrm>
+            <a:off x="457200" y="320040"/>
+            <a:ext cx="8229600" cy="822960"/>
+          </a:xfrm>
+          <a:prstGeom prst="rect">
+            <a:avLst/>
+          </a:prstGeom>
+          <a:noFill/>
+        </p:spPr>
+        <p:txBody>
+          <a:bodyPr wrap="square">
+            <a:spAutoFit/>
+          </a:bodyPr>
+          <a:lstStyle/>
+          <a:p>
+            <a:r>
+              <a:rPr sz="2600" b="1">
+                <a:solidFill>
+                  <a:srgbClr val="0B3D2E"/>
+                </a:solidFill>
+              </a:rPr>
+              <a:t>🔗 Referencias</a:t>
+            </a:r>
+          </a:p>
+        </p:txBody>
+      </p:sp>
+      <p:sp>
+        <p:nvSpPr>
+          <p:cNvPr id="3" name="TextBox 2"/>
+          <p:cNvSpPr txBox="1"/>
+          <p:nvPr/>
+        </p:nvSpPr>
+        <p:spPr>
+          <a:xfrm>
+            <a:off x="457200" y="1280160"/>
+            <a:ext cx="8229600" cy="4937760"/>
+          </a:xfrm>
+          <a:prstGeom prst="rect">
+            <a:avLst/>
+          </a:prstGeom>
+          <a:noFill/>
+        </p:spPr>
+        <p:txBody>
+          <a:bodyPr wrap="square">
+            <a:spAutoFit/>
+          </a:bodyPr>
+          <a:lstStyle/>
+          <a:p>
+            <a:pPr>
+              <a:spcAft>
+                <a:spcPts val="600"/>
+              </a:spcAft>
+            </a:pPr>
+            <a:r>
+              <a:rPr sz="1500">
+                <a:solidFill>
+                  <a:srgbClr val="22282E"/>
+                </a:solidFill>
+              </a:rPr>
               <a:t>•  MITRE ATT&amp;CK — Reconnaissance (TA0043)</a:t>
             </a:r>
           </a:p>
@@ -3569,6 +4005,81 @@
           </a:p>
         </p:txBody>
       </p:sp>
+    </p:spTree>
+  </p:cSld>
+  <p:clrMapOvr>
+    <a:masterClrMapping/>
+  </p:clrMapOvr>
+</p:sld>
+</file>
+
+<file path=ppt/slides/slide16.xml><?xml version="1.0" encoding="utf-8"?>
+<p:sld xmlns:a="http://schemas.openxmlformats.org/drawingml/2006/main" xmlns:p="http://schemas.openxmlformats.org/presentationml/2006/main" xmlns:r="http://schemas.openxmlformats.org/officeDocument/2006/relationships">
+  <p:cSld>
+    <p:spTree>
+      <p:nvGrpSpPr>
+        <p:cNvPr id="1" name=""/>
+        <p:cNvGrpSpPr/>
+        <p:nvPr/>
+      </p:nvGrpSpPr>
+      <p:grpSpPr/>
+      <p:sp>
+        <p:nvSpPr>
+          <p:cNvPr id="2" name="TextBox 1"/>
+          <p:cNvSpPr txBox="1"/>
+          <p:nvPr/>
+        </p:nvSpPr>
+        <p:spPr>
+          <a:xfrm>
+            <a:off x="457200" y="274320"/>
+            <a:ext cx="8229600" cy="640080"/>
+          </a:xfrm>
+          <a:prstGeom prst="rect">
+            <a:avLst/>
+          </a:prstGeom>
+          <a:noFill/>
+        </p:spPr>
+        <p:txBody>
+          <a:bodyPr wrap="square">
+            <a:spAutoFit/>
+          </a:bodyPr>
+          <a:lstStyle/>
+          <a:p>
+            <a:r>
+              <a:rPr sz="2200" b="1">
+                <a:solidFill>
+                  <a:srgbClr val="0B3D2E"/>
+                </a:solidFill>
+              </a:rPr>
+              <a:t>Diagrama de la clase</a:t>
+            </a:r>
+          </a:p>
+        </p:txBody>
+      </p:sp>
+      <p:pic>
+        <p:nvPicPr>
+          <p:cNvPr id="3" name="Picture 2" descr="0cd4bbaad7ca458d.png"/>
+          <p:cNvPicPr>
+            <a:picLocks noChangeAspect="1"/>
+          </p:cNvPicPr>
+          <p:nvPr/>
+        </p:nvPicPr>
+        <p:blipFill>
+          <a:blip r:embed="rId2"/>
+          <a:stretch>
+            <a:fillRect/>
+          </a:stretch>
+        </p:blipFill>
+        <p:spPr>
+          <a:xfrm>
+            <a:off x="457200" y="3264131"/>
+            <a:ext cx="8229600" cy="969818"/>
+          </a:xfrm>
+          <a:prstGeom prst="rect">
+            <a:avLst/>
+          </a:prstGeom>
+        </p:spPr>
+      </p:pic>
     </p:spTree>
   </p:cSld>
   <p:clrMapOvr>
@@ -4062,7 +4573,7 @@
                   <a:srgbClr val="0B3D2E"/>
                 </a:solidFill>
               </a:rPr>
-              <a:t>📖 Definiciones y características</a:t>
+              <a:t>🧠 Explicación en profundidad</a:t>
             </a:r>
           </a:p>
         </p:txBody>
@@ -4100,97 +4611,37 @@
                   <a:srgbClr val="22282E"/>
                 </a:solidFill>
               </a:rPr>
-              <a:t>•  Reconocimiento pasivo</a:t>
-            </a:r>
-          </a:p>
-          <a:p>
-            <a:pPr>
-              <a:spcAft>
-                <a:spcPts val="600"/>
-              </a:spcAft>
-            </a:pPr>
-            <a:r>
-              <a:rPr sz="1500">
-                <a:solidFill>
-                  <a:srgbClr val="22282E"/>
-                </a:solidFill>
-              </a:rPr>
-              <a:t>•  Obtener información sin interactuar directamente con el objetivo (OSINT, DNS público). No genera tráfico hacia el objetivo.</a:t>
-            </a:r>
-          </a:p>
-          <a:p>
-            <a:pPr>
-              <a:spcAft>
-                <a:spcPts val="600"/>
-              </a:spcAft>
-            </a:pPr>
-            <a:r>
-              <a:rPr sz="1500">
-                <a:solidFill>
-                  <a:srgbClr val="22282E"/>
-                </a:solidFill>
-              </a:rPr>
-              <a:t>•  Reconocimiento activo</a:t>
-            </a:r>
-          </a:p>
-          <a:p>
-            <a:pPr>
-              <a:spcAft>
-                <a:spcPts val="600"/>
-              </a:spcAft>
-            </a:pPr>
-            <a:r>
-              <a:rPr sz="1500">
-                <a:solidFill>
-                  <a:srgbClr val="22282E"/>
-                </a:solidFill>
-              </a:rPr>
-              <a:t>•  Interacción directa (escaneo de puertos, enumeración). Genera tráfico y requiere autorización.</a:t>
-            </a:r>
-          </a:p>
-          <a:p>
-            <a:pPr>
-              <a:spcAft>
-                <a:spcPts val="600"/>
-              </a:spcAft>
-            </a:pPr>
-            <a:r>
-              <a:rPr sz="1500">
-                <a:solidFill>
-                  <a:srgbClr val="22282E"/>
-                </a:solidFill>
-              </a:rPr>
-              <a:t>•  Correlación asistida</a:t>
-            </a:r>
-          </a:p>
-          <a:p>
-            <a:pPr>
-              <a:spcAft>
-                <a:spcPts val="600"/>
-              </a:spcAft>
-            </a:pPr>
-            <a:r>
-              <a:rPr sz="1500">
-                <a:solidFill>
-                  <a:srgbClr val="22282E"/>
-                </a:solidFill>
-              </a:rPr>
-              <a:t>•  Capacidad del agente de unir resultados de varias herramientas (puertos + servicios + versiones) en una vista de la superficie de ataque.</a:t>
-            </a:r>
-          </a:p>
-          <a:p>
-            <a:pPr>
-              <a:spcAft>
-                <a:spcPts val="600"/>
-              </a:spcAft>
-            </a:pPr>
-            <a:r>
-              <a:rPr sz="1500">
-                <a:solidFill>
-                  <a:srgbClr val="22282E"/>
-                </a:solidFill>
-              </a:rPr>
-              <a:t>•  Validación cruzada</a:t>
+              <a:t>•  La IA puede ordenar inventario y sugerir siguientes pruebas; no amplía alcance ni valida banners. Cada comando se deriva de una pregunta, pasa por política y produce artefactos reproducibles.</a:t>
+            </a:r>
+          </a:p>
+          <a:p>
+            <a:pPr>
+              <a:spcAft>
+                <a:spcPts val="600"/>
+              </a:spcAft>
+            </a:pPr>
+            <a:r>
+              <a:rPr sz="1500">
+                <a:solidFill>
+                  <a:srgbClr val="22282E"/>
+                </a:solidFill>
+              </a:rPr>
+              <a:t>•  El diagrama separa lenguaje de autoridad. El modelo puede proponer; la política determina si la operación pertenece al alcance; la herramienta produce evidencia; y una persona o control determinista…</a:t>
+            </a:r>
+          </a:p>
+          <a:p>
+            <a:pPr>
+              <a:spcAft>
+                <a:spcPts val="600"/>
+              </a:spcAft>
+            </a:pPr>
+            <a:r>
+              <a:rPr sz="1500">
+                <a:solidFill>
+                  <a:srgbClr val="22282E"/>
+                </a:solidFill>
+              </a:rPr>
+              <a:t>•  Nmap muestra versión probable. El agente la trata como hipótesis y verifica en fuente y configuración antes de asociar vulnerabilidad.</a:t>
             </a:r>
           </a:p>
         </p:txBody>
@@ -4241,7 +4692,7 @@
                   <a:srgbClr val="0B3D2E"/>
                 </a:solidFill>
               </a:rPr>
-              <a:t>🧰 Herramientas y preparación</a:t>
+              <a:t>📔 Glosario operativo</a:t>
             </a:r>
           </a:p>
         </p:txBody>
@@ -4279,22 +4730,52 @@
                   <a:srgbClr val="22282E"/>
                 </a:solidFill>
               </a:rPr>
-              <a:t>•  kali-mcp montado (clase 333) contra una VM propia. Herramientas orquestadas típicas: nmap,</a:t>
-            </a:r>
-          </a:p>
-          <a:p>
-            <a:pPr>
-              <a:spcAft>
-                <a:spcPts val="600"/>
-              </a:spcAft>
-            </a:pPr>
-            <a:r>
-              <a:rPr sz="1500">
-                <a:solidFill>
-                  <a:srgbClr val="22282E"/>
-                </a:solidFill>
-              </a:rPr>
-              <a:t>•  gobuster/ffuf, enum4linux, dnsx. Ten abierta la terminal de Kali para verificar a mano.</a:t>
+              <a:t>•  Término — Definición</a:t>
+            </a:r>
+          </a:p>
+          <a:p>
+            <a:pPr>
+              <a:spcAft>
+                <a:spcPts val="600"/>
+              </a:spcAft>
+            </a:pPr>
+            <a:r>
+              <a:rPr sz="1500">
+                <a:solidFill>
+                  <a:srgbClr val="22282E"/>
+                </a:solidFill>
+              </a:rPr>
+              <a:t>•  Plan de colección — Conjunto acotado de observaciones ligado a una pregunta.</a:t>
+            </a:r>
+          </a:p>
+          <a:p>
+            <a:pPr>
+              <a:spcAft>
+                <a:spcPts val="600"/>
+              </a:spcAft>
+            </a:pPr>
+            <a:r>
+              <a:rPr sz="1500">
+                <a:solidFill>
+                  <a:srgbClr val="22282E"/>
+                </a:solidFill>
+              </a:rPr>
+              <a:t>•  Guardrail — Capa que reduce una capacidad o detecta su uso; no garantía absoluta.</a:t>
+            </a:r>
+          </a:p>
+          <a:p>
+            <a:pPr>
+              <a:spcAft>
+                <a:spcPts val="600"/>
+              </a:spcAft>
+            </a:pPr>
+            <a:r>
+              <a:rPr sz="1500">
+                <a:solidFill>
+                  <a:srgbClr val="22282E"/>
+                </a:solidFill>
+              </a:rPr>
+              <a:t>•  Audit trail — Registro ordenado de solicitudes, decisiones, ejecuciones y resultados.</a:t>
             </a:r>
           </a:p>
         </p:txBody>
@@ -4345,7 +4826,7 @@
                   <a:srgbClr val="0B3D2E"/>
                 </a:solidFill>
               </a:rPr>
-              <a:t>🧪 Laboratorio guiado</a:t>
+              <a:t>✅ Criterio de dominio</a:t>
             </a:r>
           </a:p>
         </p:txBody>
@@ -4383,67 +4864,7 @@
                   <a:srgbClr val="22282E"/>
                 </a:solidFill>
               </a:rPr>
-              <a:t>•  Recon pasivo. Pide al agente un resumen de la información pública del objetivo (en el lab, será mínima). Observa qué infiere y qué inventa.</a:t>
-            </a:r>
-          </a:p>
-          <a:p>
-            <a:pPr>
-              <a:spcAft>
-                <a:spcPts val="600"/>
-              </a:spcAft>
-            </a:pPr>
-            <a:r>
-              <a:rPr sz="1500">
-                <a:solidFill>
-                  <a:srgbClr val="22282E"/>
-                </a:solidFill>
-              </a:rPr>
-              <a:t>•  Descubrimiento de hosts/puertos. Ejecuta el flujo de escaneo y revisa la lista de puertos/servicios propuesta.</a:t>
-            </a:r>
-          </a:p>
-          <a:p>
-            <a:pPr>
-              <a:spcAft>
-                <a:spcPts val="600"/>
-              </a:spcAft>
-            </a:pPr>
-            <a:r>
-              <a:rPr sz="1500">
-                <a:solidFill>
-                  <a:srgbClr val="22282E"/>
-                </a:solidFill>
-              </a:rPr>
-              <a:t>•  Validación. Elige 3 hallazgos y confírmalos manualmente en la terminal (nmap -sV -p &lt;puertos&gt;). ¿Coinciden?</a:t>
-            </a:r>
-          </a:p>
-          <a:p>
-            <a:pPr>
-              <a:spcAft>
-                <a:spcPts val="600"/>
-              </a:spcAft>
-            </a:pPr>
-            <a:r>
-              <a:rPr sz="1500">
-                <a:solidFill>
-                  <a:srgbClr val="22282E"/>
-                </a:solidFill>
-              </a:rPr>
-              <a:t>•  Enumeración de servicios. Pide enumeración de un servicio concreto y contrasta con la salida cruda.</a:t>
-            </a:r>
-          </a:p>
-          <a:p>
-            <a:pPr>
-              <a:spcAft>
-                <a:spcPts val="600"/>
-              </a:spcAft>
-            </a:pPr>
-            <a:r>
-              <a:rPr sz="1500">
-                <a:solidFill>
-                  <a:srgbClr val="22282E"/>
-                </a:solidFill>
-              </a:rPr>
-              <a:t>•  Mapa de superficie. Documenta la superficie de ataque descubierta (host, puerto, servicio, versión, evidencia).</a:t>
+              <a:t>•  El alumno demuestra dominio cuando reproduce el flujo completo, puede atribuir cada acción, evita que texto no confiable otorgue autoridad y explica qué control contiene un fallo del modelo.</a:t>
             </a:r>
           </a:p>
         </p:txBody>
@@ -4494,7 +4915,7 @@
                   <a:srgbClr val="0B3D2E"/>
                 </a:solidFill>
               </a:rPr>
-              <a:t>✍️ Ejercicios</a:t>
+              <a:t>📖 Definiciones y características</a:t>
             </a:r>
           </a:p>
         </p:txBody>
@@ -4532,67 +4953,97 @@
                   <a:srgbClr val="22282E"/>
                 </a:solidFill>
               </a:rPr>
-              <a:t>•  Diferencia recon pasivo y activo con un ejemplo de cada uno.</a:t>
-            </a:r>
-          </a:p>
-          <a:p>
-            <a:pPr>
-              <a:spcAft>
-                <a:spcPts val="600"/>
-              </a:spcAft>
-            </a:pPr>
-            <a:r>
-              <a:rPr sz="1500">
-                <a:solidFill>
-                  <a:srgbClr val="22282E"/>
-                </a:solidFill>
-              </a:rPr>
-              <a:t>•  ¿Qué riesgo hay si el agente "asume" una versión de servicio que no verificó?</a:t>
-            </a:r>
-          </a:p>
-          <a:p>
-            <a:pPr>
-              <a:spcAft>
-                <a:spcPts val="600"/>
-              </a:spcAft>
-            </a:pPr>
-            <a:r>
-              <a:rPr sz="1500">
-                <a:solidFill>
-                  <a:srgbClr val="22282E"/>
-                </a:solidFill>
-              </a:rPr>
-              <a:t>•  Diseña un límite de ritmo (rate) para no saturar una red de laboratorio.</a:t>
-            </a:r>
-          </a:p>
-          <a:p>
-            <a:pPr>
-              <a:spcAft>
-                <a:spcPts val="600"/>
-              </a:spcAft>
-            </a:pPr>
-            <a:r>
-              <a:rPr sz="1500">
-                <a:solidFill>
-                  <a:srgbClr val="22282E"/>
-                </a:solidFill>
-              </a:rPr>
-              <a:t>•  ¿Cómo confirmarías un subdominio que el agente afirma haber encontrado?</a:t>
-            </a:r>
-          </a:p>
-          <a:p>
-            <a:pPr>
-              <a:spcAft>
-                <a:spcPts val="600"/>
-              </a:spcAft>
-            </a:pPr>
-            <a:r>
-              <a:rPr sz="1500">
-                <a:solidFill>
-                  <a:srgbClr val="22282E"/>
-                </a:solidFill>
-              </a:rPr>
-              <a:t>•  Redacta la sección "superficie de ataque" de un informe a partir del recon.</a:t>
+              <a:t>•  Reconocimiento pasivo</a:t>
+            </a:r>
+          </a:p>
+          <a:p>
+            <a:pPr>
+              <a:spcAft>
+                <a:spcPts val="600"/>
+              </a:spcAft>
+            </a:pPr>
+            <a:r>
+              <a:rPr sz="1500">
+                <a:solidFill>
+                  <a:srgbClr val="22282E"/>
+                </a:solidFill>
+              </a:rPr>
+              <a:t>•  Obtener información sin interactuar directamente con el objetivo (OSINT, DNS público). No genera tráfico hacia el objetivo.</a:t>
+            </a:r>
+          </a:p>
+          <a:p>
+            <a:pPr>
+              <a:spcAft>
+                <a:spcPts val="600"/>
+              </a:spcAft>
+            </a:pPr>
+            <a:r>
+              <a:rPr sz="1500">
+                <a:solidFill>
+                  <a:srgbClr val="22282E"/>
+                </a:solidFill>
+              </a:rPr>
+              <a:t>•  Reconocimiento activo</a:t>
+            </a:r>
+          </a:p>
+          <a:p>
+            <a:pPr>
+              <a:spcAft>
+                <a:spcPts val="600"/>
+              </a:spcAft>
+            </a:pPr>
+            <a:r>
+              <a:rPr sz="1500">
+                <a:solidFill>
+                  <a:srgbClr val="22282E"/>
+                </a:solidFill>
+              </a:rPr>
+              <a:t>•  Interacción directa (escaneo de puertos, enumeración). Genera tráfico y requiere autorización.</a:t>
+            </a:r>
+          </a:p>
+          <a:p>
+            <a:pPr>
+              <a:spcAft>
+                <a:spcPts val="600"/>
+              </a:spcAft>
+            </a:pPr>
+            <a:r>
+              <a:rPr sz="1500">
+                <a:solidFill>
+                  <a:srgbClr val="22282E"/>
+                </a:solidFill>
+              </a:rPr>
+              <a:t>•  Correlación asistida</a:t>
+            </a:r>
+          </a:p>
+          <a:p>
+            <a:pPr>
+              <a:spcAft>
+                <a:spcPts val="600"/>
+              </a:spcAft>
+            </a:pPr>
+            <a:r>
+              <a:rPr sz="1500">
+                <a:solidFill>
+                  <a:srgbClr val="22282E"/>
+                </a:solidFill>
+              </a:rPr>
+              <a:t>•  Capacidad del agente de unir resultados de varias herramientas (puertos + servicios + versiones) en una vista de la superficie de ataque.</a:t>
+            </a:r>
+          </a:p>
+          <a:p>
+            <a:pPr>
+              <a:spcAft>
+                <a:spcPts val="600"/>
+              </a:spcAft>
+            </a:pPr>
+            <a:r>
+              <a:rPr sz="1500">
+                <a:solidFill>
+                  <a:srgbClr val="22282E"/>
+                </a:solidFill>
+              </a:rPr>
+              <a:t>•  Validación cruzada</a:t>
             </a:r>
           </a:p>
         </p:txBody>
@@ -4643,7 +5094,7 @@
                   <a:srgbClr val="0B3D2E"/>
                 </a:solidFill>
               </a:rPr>
-              <a:t>📝 Reto verificable</a:t>
+              <a:t>🧰 Herramientas y preparación</a:t>
             </a:r>
           </a:p>
         </p:txBody>
@@ -4681,52 +5132,22 @@
                   <a:srgbClr val="22282E"/>
                 </a:solidFill>
               </a:rPr>
-              <a:t>•  Con el agente, mapea la superficie de ataque de tu VM y entrega una tabla host/puerto/servicio;</a:t>
-            </a:r>
-          </a:p>
-          <a:p>
-            <a:pPr>
-              <a:spcAft>
-                <a:spcPts val="600"/>
-              </a:spcAft>
-            </a:pPr>
-            <a:r>
-              <a:rPr sz="1500">
-                <a:solidFill>
-                  <a:srgbClr val="22282E"/>
-                </a:solidFill>
-              </a:rPr>
-              <a:t>•  valida manualmente al menos el 50% de las entradas.</a:t>
-            </a:r>
-          </a:p>
-          <a:p>
-            <a:pPr>
-              <a:spcAft>
-                <a:spcPts val="600"/>
-              </a:spcAft>
-            </a:pPr>
-            <a:r>
-              <a:rPr sz="1500">
-                <a:solidFill>
-                  <a:srgbClr val="22282E"/>
-                </a:solidFill>
-              </a:rPr>
-              <a:t>•  Criterio de aceptación: cada entrada validada coincide con la salida real de la herramienta;</a:t>
-            </a:r>
-          </a:p>
-          <a:p>
-            <a:pPr>
-              <a:spcAft>
-                <a:spcPts val="600"/>
-              </a:spcAft>
-            </a:pPr>
-            <a:r>
-              <a:rPr sz="1500">
-                <a:solidFill>
-                  <a:srgbClr val="22282E"/>
-                </a:solidFill>
-              </a:rPr>
-              <a:t>•  señalas cualquier hallazgo del agente que no pudiste confirmar (posible falso positivo).</a:t>
+              <a:t>•  kali-mcp montado (clase 333) contra una VM propia. Herramientas orquestadas típicas: nmap,</a:t>
+            </a:r>
+          </a:p>
+          <a:p>
+            <a:pPr>
+              <a:spcAft>
+                <a:spcPts val="600"/>
+              </a:spcAft>
+            </a:pPr>
+            <a:r>
+              <a:rPr sz="1500">
+                <a:solidFill>
+                  <a:srgbClr val="22282E"/>
+                </a:solidFill>
+              </a:rPr>
+              <a:t>•  gobuster/ffuf, enum4linux, dnsx. Ten abierta la terminal de Kali para verificar a mano.</a:t>
             </a:r>
           </a:p>
         </p:txBody>
